--- a/04-da-v8-user-journey/13-user-journey.pptx
+++ b/04-da-v8-user-journey/13-user-journey.pptx
@@ -102,7 +102,7 @@
                 <a:tab algn="l" pos="0"/>
               </a:tabLst>
             </a:pPr>
-            <a:fld id="{6BBA5931-52C5-41D8-8F99-F0E0D7973A06}" type="slidenum">
+            <a:fld id="{A40E95E8-3F5B-4741-A82D-B8A83B665F7A}" type="slidenum">
               <a:rPr b="0" lang="en" sz="1000" strike="noStrike" u="none">
                 <a:solidFill>
                   <a:schemeClr val="dk2"/>
@@ -818,7 +818,7 @@
                 <a:tab algn="l" pos="0"/>
               </a:tabLst>
             </a:pPr>
-            <a:fld id="{1F09031A-D208-401A-87A1-5A36D99EEEDA}" type="slidenum">
+            <a:fld id="{A647743C-2149-415A-977D-DCDBBB3D6544}" type="slidenum">
               <a:rPr b="0" lang="en" sz="1000" strike="noStrike" u="none">
                 <a:solidFill>
                   <a:schemeClr val="dk2"/>
@@ -2082,7 +2082,7 @@
                 <a:tab algn="l" pos="0"/>
               </a:tabLst>
             </a:pPr>
-            <a:fld id="{B834498E-2C36-46B3-AD34-5CBB345444B0}" type="slidenum">
+            <a:fld id="{EA1181D4-752D-4259-8710-D7C58E7D7929}" type="slidenum">
               <a:rPr b="0" lang="en" sz="1000" strike="noStrike" u="none">
                 <a:solidFill>
                   <a:schemeClr val="dk2"/>
@@ -3894,7 +3894,7 @@
                 <a:tab algn="l" pos="0"/>
               </a:tabLst>
             </a:pPr>
-            <a:fld id="{C8A686B7-D512-4573-B0B0-25BEFCD00335}" type="slidenum">
+            <a:fld id="{04F6DB1E-65D1-4C13-A85C-1071CD7B37FF}" type="slidenum">
               <a:rPr b="0" lang="en" sz="1000" strike="noStrike" u="none">
                 <a:solidFill>
                   <a:schemeClr val="dk2"/>
@@ -4003,7 +4003,7 @@
                 <a:tab algn="l" pos="0"/>
               </a:tabLst>
             </a:pPr>
-            <a:fld id="{DBE5E9F3-2652-488E-A4D8-6BE6F48ACBF1}" type="slidenum">
+            <a:fld id="{DB991043-A16E-4FC3-9862-1185B90BE873}" type="slidenum">
               <a:rPr b="0" lang="en" sz="1000" strike="noStrike" u="none">
                 <a:solidFill>
                   <a:schemeClr val="dk2"/>
@@ -4504,7 +4504,7 @@
                 <a:tab algn="l" pos="0"/>
               </a:tabLst>
             </a:pPr>
-            <a:fld id="{FC28FDA4-1D0F-41EA-B357-3D2003CB74F8}" type="slidenum">
+            <a:fld id="{6B4256E6-F974-42D0-BDC9-F26B6F6ED2ED}" type="slidenum">
               <a:rPr b="0" lang="en" sz="1000" strike="noStrike" u="none">
                 <a:solidFill>
                   <a:schemeClr val="dk2"/>
@@ -4946,7 +4946,7 @@
                 <a:tab algn="l" pos="0"/>
               </a:tabLst>
             </a:pPr>
-            <a:fld id="{AF91BAB9-A686-45BE-8D6B-7FB3678489D0}" type="slidenum">
+            <a:fld id="{897AA8FF-BC0A-4541-8ED6-11007D982F17}" type="slidenum">
               <a:rPr b="0" lang="en" sz="1000" strike="noStrike" u="none">
                 <a:solidFill>
                   <a:schemeClr val="dk2"/>
@@ -5662,7 +5662,7 @@
                 <a:tab algn="l" pos="0"/>
               </a:tabLst>
             </a:pPr>
-            <a:fld id="{800C60CB-EFE2-45FE-994B-132FE9EFFBB6}" type="slidenum">
+            <a:fld id="{C8CA725A-D7E0-4104-BAE8-3B11E01B599A}" type="slidenum">
               <a:rPr b="0" lang="en" sz="1000" strike="noStrike" u="none">
                 <a:solidFill>
                   <a:schemeClr val="dk2"/>
@@ -5830,7 +5830,7 @@
                 <a:tab algn="l" pos="0"/>
               </a:tabLst>
             </a:pPr>
-            <a:fld id="{D23DC3D3-9898-4CDC-A6FB-1FC51D4BA380}" type="slidenum">
+            <a:fld id="{9E1339D3-F6AE-439E-B55A-661C6D21C517}" type="slidenum">
               <a:rPr b="0" lang="en" sz="1000" strike="noStrike" u="none">
                 <a:solidFill>
                   <a:schemeClr val="dk2"/>
@@ -5939,7 +5939,7 @@
                 <a:tab algn="l" pos="0"/>
               </a:tabLst>
             </a:pPr>
-            <a:fld id="{2AC465FA-41E7-47D5-9617-83BA82ACDB13}" type="slidenum">
+            <a:fld id="{B412B98A-23D4-47F7-B1B9-F91D2658AA1E}" type="slidenum">
               <a:rPr b="0" lang="en" sz="1000" strike="noStrike" u="none">
                 <a:solidFill>
                   <a:schemeClr val="dk2"/>
@@ -6929,7 +6929,7 @@
                 <a:tab algn="l" pos="0"/>
               </a:tabLst>
             </a:pPr>
-            <a:fld id="{275EE6CC-7B43-475B-9A34-9237ADB6235D}" type="slidenum">
+            <a:fld id="{46B28BD5-4D5E-46DF-89FE-960BB9018F5C}" type="slidenum">
               <a:rPr b="0" lang="en" sz="1000" strike="noStrike" u="none">
                 <a:solidFill>
                   <a:schemeClr val="dk2"/>
@@ -7097,7 +7097,7 @@
                 <a:tab algn="l" pos="0"/>
               </a:tabLst>
             </a:pPr>
-            <a:fld id="{9948FC6B-3348-4277-8E46-EE529126968F}" type="slidenum">
+            <a:fld id="{4D666336-0A1F-412F-9BBF-C5C11CC1F108}" type="slidenum">
               <a:rPr b="0" lang="en" sz="1000" strike="noStrike" u="none">
                 <a:solidFill>
                   <a:schemeClr val="dk2"/>
@@ -8087,7 +8087,7 @@
                 <a:tab algn="l" pos="0"/>
               </a:tabLst>
             </a:pPr>
-            <a:fld id="{C11DEDEE-26AF-447C-AFF4-E66E4AD26889}" type="slidenum">
+            <a:fld id="{8BBDF3B9-B4C0-4737-B90D-9FA6A7178BB8}" type="slidenum">
               <a:rPr b="0" lang="en" sz="1000" strike="noStrike" u="none">
                 <a:solidFill>
                   <a:schemeClr val="dk2"/>
@@ -9077,7 +9077,7 @@
                 <a:tab algn="l" pos="0"/>
               </a:tabLst>
             </a:pPr>
-            <a:fld id="{6911E987-CCAC-4103-82F9-42F7F4C9BC5E}" type="slidenum">
+            <a:fld id="{A201AFED-20A1-4726-89A6-826C9148ADC3}" type="slidenum">
               <a:rPr b="0" lang="en" sz="1000" strike="noStrike" u="none">
                 <a:solidFill>
                   <a:schemeClr val="dk2"/>
@@ -9793,7 +9793,7 @@
                 <a:tab algn="l" pos="0"/>
               </a:tabLst>
             </a:pPr>
-            <a:fld id="{9CFFE4B7-A635-48A5-8048-4B34E7CD69B3}" type="slidenum">
+            <a:fld id="{7C3260CC-6D87-493B-8768-C5FFFF0F85F4}" type="slidenum">
               <a:rPr b="0" lang="en" sz="1000" strike="noStrike" u="none">
                 <a:solidFill>
                   <a:schemeClr val="dk2"/>
@@ -11057,7 +11057,7 @@
                 <a:tab algn="l" pos="0"/>
               </a:tabLst>
             </a:pPr>
-            <a:fld id="{F3869B40-4F08-414A-BF8F-79619774B927}" type="slidenum">
+            <a:fld id="{B81E8091-99E6-453D-8F67-674F3BD9AA45}" type="slidenum">
               <a:rPr b="0" lang="en" sz="1000" strike="noStrike" u="none">
                 <a:solidFill>
                   <a:schemeClr val="dk2"/>
@@ -12869,7 +12869,7 @@
                 <a:tab algn="l" pos="0"/>
               </a:tabLst>
             </a:pPr>
-            <a:fld id="{82B15DB0-D6E7-42E7-ABA2-C906D97DEB40}" type="slidenum">
+            <a:fld id="{B473DE38-4EA4-415B-8B15-23DB5E9C9451}" type="slidenum">
               <a:rPr b="0" lang="en" sz="1000" strike="noStrike" u="none">
                 <a:solidFill>
                   <a:schemeClr val="dk2"/>
@@ -12928,7 +12928,7 @@
         <p:txBody>
           <a:bodyPr/>
           <a:p>
-            <a:fld id="{6C0FF5FA-EAF9-44CA-BDEC-F408A0933C26}" type="slidenum">
+            <a:fld id="{C9F8F072-075D-48E0-B0E7-621C54083C5B}" type="slidenum">
               <a:t>&lt;#&gt;</a:t>
             </a:fld>
           </a:p>
@@ -12970,7 +12970,7 @@
         <p:txBody>
           <a:bodyPr/>
           <a:p>
-            <a:fld id="{D774F2C8-4B5C-49AC-9F9F-63E2CB5F85B0}" type="slidenum">
+            <a:fld id="{5B13216B-B3C7-4801-A7DE-CEBE4CC9222A}" type="slidenum">
               <a:t>&lt;#&gt;</a:t>
             </a:fld>
           </a:p>
@@ -13395,7 +13395,7 @@
                 <a:tab algn="l" pos="0"/>
               </a:tabLst>
             </a:pPr>
-            <a:fld id="{F5B1FF9B-9996-4E1E-AC1E-290DFF9D2E2E}" type="slidenum">
+            <a:fld id="{E8F084DA-D458-4FF9-A1CB-6FC5F76A284F}" type="slidenum">
               <a:rPr b="0" lang="en" sz="1000" strike="noStrike" u="none">
                 <a:solidFill>
                   <a:schemeClr val="dk2"/>
@@ -14111,7 +14111,7 @@
                 <a:tab algn="l" pos="0"/>
               </a:tabLst>
             </a:pPr>
-            <a:fld id="{8A8466E8-C362-4B73-A26F-876923E13794}" type="slidenum">
+            <a:fld id="{5DBEB97E-1957-48B4-B22B-C728857414CE}" type="slidenum">
               <a:rPr b="0" lang="en" sz="1000" strike="noStrike" u="none">
                 <a:solidFill>
                   <a:schemeClr val="dk2"/>
@@ -14279,7 +14279,7 @@
                 <a:tab algn="l" pos="0"/>
               </a:tabLst>
             </a:pPr>
-            <a:fld id="{A5CB6F44-FC85-49B6-ACA4-8B7B6E8FA7B5}" type="slidenum">
+            <a:fld id="{63ECD0C7-9A46-4D98-90C2-6FC6437CD7BD}" type="slidenum">
               <a:rPr b="0" lang="en" sz="1000" strike="noStrike" u="none">
                 <a:solidFill>
                   <a:schemeClr val="dk2"/>
@@ -14388,7 +14388,7 @@
                 <a:tab algn="l" pos="0"/>
               </a:tabLst>
             </a:pPr>
-            <a:fld id="{D709FC98-3747-4E35-A7FB-FAB7820B5F50}" type="slidenum">
+            <a:fld id="{B7746D5A-F7AB-41D9-8EFA-E4EA6959AEBF}" type="slidenum">
               <a:rPr b="0" lang="en" sz="1000" strike="noStrike" u="none">
                 <a:solidFill>
                   <a:schemeClr val="dk2"/>
@@ -15378,7 +15378,7 @@
                 <a:tab algn="l" pos="0"/>
               </a:tabLst>
             </a:pPr>
-            <a:fld id="{02756A6C-1636-486E-BBE5-8918426D9FA1}" type="slidenum">
+            <a:fld id="{A7F1BD43-8257-456E-92FA-55BAE4018DD9}" type="slidenum">
               <a:rPr b="0" lang="en" sz="1000" strike="noStrike" u="none">
                 <a:solidFill>
                   <a:schemeClr val="dk2"/>
@@ -16368,7 +16368,7 @@
                 <a:tab algn="l" pos="0"/>
               </a:tabLst>
             </a:pPr>
-            <a:fld id="{E37C578A-8D12-4406-8377-C1CCB095B5BB}" type="slidenum">
+            <a:fld id="{2F327C8D-E789-45EA-A134-67C43153DA8D}" type="slidenum">
               <a:rPr b="0" lang="en" sz="1000" strike="noStrike" u="none">
                 <a:solidFill>
                   <a:schemeClr val="dk2"/>
@@ -17358,7 +17358,7 @@
                 <a:tab algn="l" pos="0"/>
               </a:tabLst>
             </a:pPr>
-            <a:fld id="{635C3CD2-DC1F-4DF5-BD6D-37258C0CF9B4}" type="slidenum">
+            <a:fld id="{D9C2F211-7AC9-4715-8DA0-B07103E8B139}" type="slidenum">
               <a:rPr b="0" lang="en" sz="1000" strike="noStrike" u="none">
                 <a:solidFill>
                   <a:schemeClr val="dk2"/>
@@ -17541,7 +17541,7 @@
                 <a:tab algn="l" pos="0"/>
               </a:tabLst>
             </a:pPr>
-            <a:fld id="{BCEE034D-85BB-4EB3-9126-DF13B75621FC}" type="slidenum">
+            <a:fld id="{65B68C10-5C9F-448C-A64D-E5C97821D021}" type="slidenum">
               <a:rPr b="0" lang="en" sz="1000" strike="noStrike" u="none">
                 <a:solidFill>
                   <a:schemeClr val="dk2"/>
@@ -17960,7 +17960,7 @@
                 <a:tab algn="l" pos="0"/>
               </a:tabLst>
             </a:pPr>
-            <a:fld id="{FEFC663A-312E-4281-BE0E-6E76443C45D8}" type="slidenum">
+            <a:fld id="{C7EBA0E0-5ADD-4E91-AEE4-7326DC6E6AD8}" type="slidenum">
               <a:rPr b="0" lang="en" sz="1000" strike="noStrike" u="none">
                 <a:solidFill>
                   <a:schemeClr val="dk2"/>
@@ -18460,7 +18460,7 @@
                 <a:tab algn="l" pos="0"/>
               </a:tabLst>
             </a:pPr>
-            <a:fld id="{7A9210F0-E758-4887-94D3-3D38E70E545E}" type="datetime5">
+            <a:fld id="{AD1C569B-DEE9-4A3F-A500-F0762C328427}" type="datetime5">
               <a:rPr b="0" lang="en" sz="1200" strike="noStrike" u="none">
                 <a:solidFill>
                   <a:srgbClr val="2a2a2a"/>
@@ -19804,31 +19804,7 @@
                 <a:latin typeface="Arial"/>
                 <a:ea typeface="Arial"/>
               </a:rPr>
-              <a:t>Entender un </a:t>
-            </a:r>
-            <a:r>
-              <a:rPr b="0" i="1" lang="es-ES" sz="1800" strike="noStrike" u="none">
-                <a:solidFill>
-                  <a:srgbClr val="000000"/>
-                </a:solidFill>
-                <a:effectLst/>
-                <a:uFillTx/>
-                <a:latin typeface="Arial"/>
-                <a:ea typeface="Arial"/>
-              </a:rPr>
-              <a:t>user journey</a:t>
-            </a:r>
-            <a:r>
-              <a:rPr b="0" lang="es-ES" sz="1800" strike="noStrike" u="none">
-                <a:solidFill>
-                  <a:srgbClr val="000000"/>
-                </a:solidFill>
-                <a:effectLst/>
-                <a:uFillTx/>
-                <a:latin typeface="Arial"/>
-                <a:ea typeface="Arial"/>
-              </a:rPr>
-              <a:t> y preparar los datos para su analisis</a:t>
+              <a:t>Aprender a simular escenarios sobre embudos de conversión</a:t>
             </a:r>
             <a:endParaRPr b="0" lang="es-MX" sz="1800" strike="noStrike" u="none">
               <a:solidFill>
@@ -19893,7 +19869,7 @@
                 <a:latin typeface="Arial"/>
                 <a:ea typeface="Arial"/>
               </a:rPr>
-              <a:t>Analizar la conversión de clientes usando embudos de conversión</a:t>
+              <a:t>Estimar el impacto económico de una mejora </a:t>
             </a:r>
             <a:endParaRPr b="0" lang="es-MX" sz="1800" strike="noStrike" u="none">
               <a:solidFill>
@@ -19958,7 +19934,7 @@
                 <a:latin typeface="Arial"/>
                 <a:ea typeface="Arial"/>
               </a:rPr>
-              <a:t>Segmentar clientes por cohortes para su analisis </a:t>
+              <a:t>Hacer comparativos entre segmentos o fuentes de usuarios</a:t>
             </a:r>
             <a:endParaRPr b="0" lang="es-MX" sz="1800" strike="noStrike" u="none">
               <a:solidFill>

--- a/04-da-v8-user-journey/13-user-journey.pptx
+++ b/04-da-v8-user-journey/13-user-journey.pptx
@@ -102,7 +102,7 @@
                 <a:tab algn="l" pos="0"/>
               </a:tabLst>
             </a:pPr>
-            <a:fld id="{A40E95E8-3F5B-4741-A82D-B8A83B665F7A}" type="slidenum">
+            <a:fld id="{84AE1515-E38A-4A4D-9E55-EA690649250E}" type="slidenum">
               <a:rPr b="0" lang="en" sz="1000" strike="noStrike" u="none">
                 <a:solidFill>
                   <a:schemeClr val="dk2"/>
@@ -112,7 +112,7 @@
                 <a:latin typeface="Arial"/>
                 <a:ea typeface="Arial"/>
               </a:rPr>
-              <a:t>&lt;número&gt;</a:t>
+              <a:t>1</a:t>
             </a:fld>
             <a:endParaRPr b="0" lang="es-MX" sz="1000" strike="noStrike" u="none">
               <a:solidFill>
@@ -818,7 +818,7 @@
                 <a:tab algn="l" pos="0"/>
               </a:tabLst>
             </a:pPr>
-            <a:fld id="{A647743C-2149-415A-977D-DCDBBB3D6544}" type="slidenum">
+            <a:fld id="{584999FE-D9A6-4BE7-BB6F-C0E321BE3ACE}" type="slidenum">
               <a:rPr b="0" lang="en" sz="1000" strike="noStrike" u="none">
                 <a:solidFill>
                   <a:schemeClr val="dk2"/>
@@ -2082,7 +2082,7 @@
                 <a:tab algn="l" pos="0"/>
               </a:tabLst>
             </a:pPr>
-            <a:fld id="{EA1181D4-752D-4259-8710-D7C58E7D7929}" type="slidenum">
+            <a:fld id="{4C1AA353-9573-4F25-87AF-38D6247C5394}" type="slidenum">
               <a:rPr b="0" lang="en" sz="1000" strike="noStrike" u="none">
                 <a:solidFill>
                   <a:schemeClr val="dk2"/>
@@ -3894,7 +3894,7 @@
                 <a:tab algn="l" pos="0"/>
               </a:tabLst>
             </a:pPr>
-            <a:fld id="{04F6DB1E-65D1-4C13-A85C-1071CD7B37FF}" type="slidenum">
+            <a:fld id="{96703701-D9F5-47A0-8DD6-F7221F2BEC78}" type="slidenum">
               <a:rPr b="0" lang="en" sz="1000" strike="noStrike" u="none">
                 <a:solidFill>
                   <a:schemeClr val="dk2"/>
@@ -4003,7 +4003,7 @@
                 <a:tab algn="l" pos="0"/>
               </a:tabLst>
             </a:pPr>
-            <a:fld id="{DB991043-A16E-4FC3-9862-1185B90BE873}" type="slidenum">
+            <a:fld id="{73540A95-D5B1-4065-A61C-21D59A994134}" type="slidenum">
               <a:rPr b="0" lang="en" sz="1000" strike="noStrike" u="none">
                 <a:solidFill>
                   <a:schemeClr val="dk2"/>
@@ -4504,7 +4504,7 @@
                 <a:tab algn="l" pos="0"/>
               </a:tabLst>
             </a:pPr>
-            <a:fld id="{6B4256E6-F974-42D0-BDC9-F26B6F6ED2ED}" type="slidenum">
+            <a:fld id="{D73CD936-A19E-47C8-850C-011F832E28EA}" type="slidenum">
               <a:rPr b="0" lang="en" sz="1000" strike="noStrike" u="none">
                 <a:solidFill>
                   <a:schemeClr val="dk2"/>
@@ -4946,7 +4946,7 @@
                 <a:tab algn="l" pos="0"/>
               </a:tabLst>
             </a:pPr>
-            <a:fld id="{897AA8FF-BC0A-4541-8ED6-11007D982F17}" type="slidenum">
+            <a:fld id="{B285DC7B-3B6E-4ACB-B842-D7EA0E757987}" type="slidenum">
               <a:rPr b="0" lang="en" sz="1000" strike="noStrike" u="none">
                 <a:solidFill>
                   <a:schemeClr val="dk2"/>
@@ -5662,7 +5662,7 @@
                 <a:tab algn="l" pos="0"/>
               </a:tabLst>
             </a:pPr>
-            <a:fld id="{C8CA725A-D7E0-4104-BAE8-3B11E01B599A}" type="slidenum">
+            <a:fld id="{51770E9E-7F37-4FC8-83D6-6E445186DED7}" type="slidenum">
               <a:rPr b="0" lang="en" sz="1000" strike="noStrike" u="none">
                 <a:solidFill>
                   <a:schemeClr val="dk2"/>
@@ -5830,7 +5830,7 @@
                 <a:tab algn="l" pos="0"/>
               </a:tabLst>
             </a:pPr>
-            <a:fld id="{9E1339D3-F6AE-439E-B55A-661C6D21C517}" type="slidenum">
+            <a:fld id="{F809E626-66EB-420E-8E16-4EDD943B53B9}" type="slidenum">
               <a:rPr b="0" lang="en" sz="1000" strike="noStrike" u="none">
                 <a:solidFill>
                   <a:schemeClr val="dk2"/>
@@ -5939,7 +5939,7 @@
                 <a:tab algn="l" pos="0"/>
               </a:tabLst>
             </a:pPr>
-            <a:fld id="{B412B98A-23D4-47F7-B1B9-F91D2658AA1E}" type="slidenum">
+            <a:fld id="{836BC9CC-7FE0-42F1-A943-28AB3D736296}" type="slidenum">
               <a:rPr b="0" lang="en" sz="1000" strike="noStrike" u="none">
                 <a:solidFill>
                   <a:schemeClr val="dk2"/>
@@ -6929,7 +6929,7 @@
                 <a:tab algn="l" pos="0"/>
               </a:tabLst>
             </a:pPr>
-            <a:fld id="{46B28BD5-4D5E-46DF-89FE-960BB9018F5C}" type="slidenum">
+            <a:fld id="{90029B21-321C-446E-8A7E-3FADB95D313D}" type="slidenum">
               <a:rPr b="0" lang="en" sz="1000" strike="noStrike" u="none">
                 <a:solidFill>
                   <a:schemeClr val="dk2"/>
@@ -7097,7 +7097,7 @@
                 <a:tab algn="l" pos="0"/>
               </a:tabLst>
             </a:pPr>
-            <a:fld id="{4D666336-0A1F-412F-9BBF-C5C11CC1F108}" type="slidenum">
+            <a:fld id="{23D22752-7450-4B5F-94C5-0CA85D157BD8}" type="slidenum">
               <a:rPr b="0" lang="en" sz="1000" strike="noStrike" u="none">
                 <a:solidFill>
                   <a:schemeClr val="dk2"/>
@@ -7107,7 +7107,7 @@
                 <a:latin typeface="Arial"/>
                 <a:ea typeface="Arial"/>
               </a:rPr>
-              <a:t>&lt;número&gt;</a:t>
+              <a:t>1</a:t>
             </a:fld>
             <a:endParaRPr b="0" lang="es-MX" sz="1000" strike="noStrike" u="none">
               <a:solidFill>
@@ -8087,7 +8087,7 @@
                 <a:tab algn="l" pos="0"/>
               </a:tabLst>
             </a:pPr>
-            <a:fld id="{8BBDF3B9-B4C0-4737-B90D-9FA6A7178BB8}" type="slidenum">
+            <a:fld id="{4421C051-8841-41A9-A3C9-ACE5D01DE52D}" type="slidenum">
               <a:rPr b="0" lang="en" sz="1000" strike="noStrike" u="none">
                 <a:solidFill>
                   <a:schemeClr val="dk2"/>
@@ -9077,7 +9077,7 @@
                 <a:tab algn="l" pos="0"/>
               </a:tabLst>
             </a:pPr>
-            <a:fld id="{A201AFED-20A1-4726-89A6-826C9148ADC3}" type="slidenum">
+            <a:fld id="{8909C3C6-131E-492B-8B99-7E8E39D450F5}" type="slidenum">
               <a:rPr b="0" lang="en" sz="1000" strike="noStrike" u="none">
                 <a:solidFill>
                   <a:schemeClr val="dk2"/>
@@ -9793,7 +9793,7 @@
                 <a:tab algn="l" pos="0"/>
               </a:tabLst>
             </a:pPr>
-            <a:fld id="{7C3260CC-6D87-493B-8768-C5FFFF0F85F4}" type="slidenum">
+            <a:fld id="{942E68EF-4686-4427-816D-043361019448}" type="slidenum">
               <a:rPr b="0" lang="en" sz="1000" strike="noStrike" u="none">
                 <a:solidFill>
                   <a:schemeClr val="dk2"/>
@@ -11057,7 +11057,7 @@
                 <a:tab algn="l" pos="0"/>
               </a:tabLst>
             </a:pPr>
-            <a:fld id="{B81E8091-99E6-453D-8F67-674F3BD9AA45}" type="slidenum">
+            <a:fld id="{C6375CE6-C613-433F-9C96-A020C187185D}" type="slidenum">
               <a:rPr b="0" lang="en" sz="1000" strike="noStrike" u="none">
                 <a:solidFill>
                   <a:schemeClr val="dk2"/>
@@ -12869,7 +12869,7 @@
                 <a:tab algn="l" pos="0"/>
               </a:tabLst>
             </a:pPr>
-            <a:fld id="{B473DE38-4EA4-415B-8B15-23DB5E9C9451}" type="slidenum">
+            <a:fld id="{009E6698-567F-4C47-AEF1-A848C29FF1BE}" type="slidenum">
               <a:rPr b="0" lang="en" sz="1000" strike="noStrike" u="none">
                 <a:solidFill>
                   <a:schemeClr val="dk2"/>
@@ -12928,7 +12928,7 @@
         <p:txBody>
           <a:bodyPr/>
           <a:p>
-            <a:fld id="{C9F8F072-075D-48E0-B0E7-621C54083C5B}" type="slidenum">
+            <a:fld id="{37CD9B8A-B377-4451-BC6D-756D457A2FBB}" type="slidenum">
               <a:t>&lt;#&gt;</a:t>
             </a:fld>
           </a:p>
@@ -12970,7 +12970,7 @@
         <p:txBody>
           <a:bodyPr/>
           <a:p>
-            <a:fld id="{5B13216B-B3C7-4801-A7DE-CEBE4CC9222A}" type="slidenum">
+            <a:fld id="{05DB9AE4-89A0-4BA2-A1B5-DB6701E4637B}" type="slidenum">
               <a:t>&lt;#&gt;</a:t>
             </a:fld>
           </a:p>
@@ -13395,7 +13395,7 @@
                 <a:tab algn="l" pos="0"/>
               </a:tabLst>
             </a:pPr>
-            <a:fld id="{E8F084DA-D458-4FF9-A1CB-6FC5F76A284F}" type="slidenum">
+            <a:fld id="{4838F5BD-9959-457B-89D1-5AAE4F64117D}" type="slidenum">
               <a:rPr b="0" lang="en" sz="1000" strike="noStrike" u="none">
                 <a:solidFill>
                   <a:schemeClr val="dk2"/>
@@ -14111,7 +14111,7 @@
                 <a:tab algn="l" pos="0"/>
               </a:tabLst>
             </a:pPr>
-            <a:fld id="{5DBEB97E-1957-48B4-B22B-C728857414CE}" type="slidenum">
+            <a:fld id="{D7243658-1609-4371-9990-B569DDCBA8EB}" type="slidenum">
               <a:rPr b="0" lang="en" sz="1000" strike="noStrike" u="none">
                 <a:solidFill>
                   <a:schemeClr val="dk2"/>
@@ -14279,7 +14279,7 @@
                 <a:tab algn="l" pos="0"/>
               </a:tabLst>
             </a:pPr>
-            <a:fld id="{63ECD0C7-9A46-4D98-90C2-6FC6437CD7BD}" type="slidenum">
+            <a:fld id="{37BF47E6-55B4-4F75-8662-D578B4F9D23E}" type="slidenum">
               <a:rPr b="0" lang="en" sz="1000" strike="noStrike" u="none">
                 <a:solidFill>
                   <a:schemeClr val="dk2"/>
@@ -14388,7 +14388,7 @@
                 <a:tab algn="l" pos="0"/>
               </a:tabLst>
             </a:pPr>
-            <a:fld id="{B7746D5A-F7AB-41D9-8EFA-E4EA6959AEBF}" type="slidenum">
+            <a:fld id="{4C9C90BD-268B-4546-B9C1-EAFD19D538CF}" type="slidenum">
               <a:rPr b="0" lang="en" sz="1000" strike="noStrike" u="none">
                 <a:solidFill>
                   <a:schemeClr val="dk2"/>
@@ -15378,7 +15378,7 @@
                 <a:tab algn="l" pos="0"/>
               </a:tabLst>
             </a:pPr>
-            <a:fld id="{A7F1BD43-8257-456E-92FA-55BAE4018DD9}" type="slidenum">
+            <a:fld id="{106B62BC-6D3F-41EF-BF6E-1E84C8699F19}" type="slidenum">
               <a:rPr b="0" lang="en" sz="1000" strike="noStrike" u="none">
                 <a:solidFill>
                   <a:schemeClr val="dk2"/>
@@ -16368,7 +16368,7 @@
                 <a:tab algn="l" pos="0"/>
               </a:tabLst>
             </a:pPr>
-            <a:fld id="{2F327C8D-E789-45EA-A134-67C43153DA8D}" type="slidenum">
+            <a:fld id="{D066EAB4-A70C-4091-AFC1-9CBBD212E4FA}" type="slidenum">
               <a:rPr b="0" lang="en" sz="1000" strike="noStrike" u="none">
                 <a:solidFill>
                   <a:schemeClr val="dk2"/>
@@ -17358,7 +17358,7 @@
                 <a:tab algn="l" pos="0"/>
               </a:tabLst>
             </a:pPr>
-            <a:fld id="{D9C2F211-7AC9-4715-8DA0-B07103E8B139}" type="slidenum">
+            <a:fld id="{2E13CF55-0F92-430B-80E5-C3ED9E598B40}" type="slidenum">
               <a:rPr b="0" lang="en" sz="1000" strike="noStrike" u="none">
                 <a:solidFill>
                   <a:schemeClr val="dk2"/>
@@ -17541,7 +17541,7 @@
                 <a:tab algn="l" pos="0"/>
               </a:tabLst>
             </a:pPr>
-            <a:fld id="{65B68C10-5C9F-448C-A64D-E5C97821D021}" type="slidenum">
+            <a:fld id="{598CC868-4B62-462C-B21D-72AB33F4577E}" type="slidenum">
               <a:rPr b="0" lang="en" sz="1000" strike="noStrike" u="none">
                 <a:solidFill>
                   <a:schemeClr val="dk2"/>
@@ -17960,7 +17960,7 @@
                 <a:tab algn="l" pos="0"/>
               </a:tabLst>
             </a:pPr>
-            <a:fld id="{C7EBA0E0-5ADD-4E91-AEE4-7326DC6E6AD8}" type="slidenum">
+            <a:fld id="{D33EBBD6-7604-4C72-BDD1-720CA56F2E60}" type="slidenum">
               <a:rPr b="0" lang="en" sz="1000" strike="noStrike" u="none">
                 <a:solidFill>
                   <a:schemeClr val="dk2"/>
@@ -18460,7 +18460,7 @@
                 <a:tab algn="l" pos="0"/>
               </a:tabLst>
             </a:pPr>
-            <a:fld id="{AD1C569B-DEE9-4A3F-A500-F0762C328427}" type="datetime5">
+            <a:fld id="{B612E836-A890-4795-AE83-D359B0614324}" type="datetime5">
               <a:rPr b="0" lang="en" sz="1200" strike="noStrike" u="none">
                 <a:solidFill>
                   <a:srgbClr val="2a2a2a"/>
@@ -19417,7 +19417,7 @@
                 <a:latin typeface="Inter"/>
                 <a:ea typeface="Inter"/>
               </a:rPr>
-              <a:t>Sesion del Jueves 20 Nov → 19 Nov 8 PM CDMX</a:t>
+              <a:t>Sesión del Jueves 20 Nov → 19 Nov 8 PM CDMX</a:t>
             </a:r>
             <a:endParaRPr b="0" lang="es-MX" sz="2100" strike="noStrike" u="none">
               <a:solidFill>
@@ -19449,7 +19449,7 @@
                 <a:latin typeface="Inter"/>
                 <a:ea typeface="Inter"/>
               </a:rPr>
-              <a:t>Recorrido proyecto sprint 4</a:t>
+              <a:t>Recorrido proyecto Sprint 4</a:t>
             </a:r>
             <a:endParaRPr b="0" lang="es-MX" sz="2100" strike="noStrike" u="none">
               <a:solidFill>
